--- a/docs/blueprint/兴隆沟村智能系统蓝图汇报.pptx
+++ b/docs/blueprint/兴隆沟村智能系统蓝图汇报.pptx
@@ -5885,7 +5885,7 @@
                 <a:latin typeface="Microsoft YaHei"/>
                 <a:ea typeface="Microsoft YaHei"/>
               </a:rPr>
-              <a:t>Agent 编排器 · 工具网关 · 模型网关 · RAG 检索 · 安全护栏 · 事件总线</a:t>
+              <a:t>LangGraph 编排器 · 工具网关 · 模型网关 · RAG 检索 · 安全护栏 · 事件总线</a:t>
             </a:r>
           </a:p>
         </p:txBody>

--- a/docs/blueprint/兴隆沟村智能系统蓝图汇报.pptx
+++ b/docs/blueprint/兴隆沟村智能系统蓝图汇报.pptx
@@ -5885,7 +5885,7 @@
                 <a:latin typeface="Microsoft YaHei"/>
                 <a:ea typeface="Microsoft YaHei"/>
               </a:rPr>
-              <a:t>LangGraph 编排器 · 工具网关 · 模型网关 · RAG 检索 · 安全护栏 · 事件总线</a:t>
+              <a:t>长驻 Agent 运行时 · LangGraph 编排器 · 工具网关 · 模型网关 · RAG · 护栏 · 事件总线</a:t>
             </a:r>
           </a:p>
         </p:txBody>
